--- a/LLM-агент юридического ассистента.pptx
+++ b/LLM-агент юридического ассистента.pptx
@@ -8158,7 +8158,7 @@
             <a:pPr rtl="0"/>
             <a:fld id="{17C81BD1-78DD-4346-A058-9DF7404AC282}" type="datetime1">
               <a:rPr lang="ru-RU" noProof="1" smtClean="0"/>
-              <a:t>01.03.2026</a:t>
+              <a:t>03.03.2026</a:t>
             </a:fld>
             <a:endParaRPr lang="ru-RU" noProof="1"/>
           </a:p>
@@ -8340,7 +8340,7 @@
             <a:pPr rtl="0"/>
             <a:fld id="{635290D6-ED25-48F8-862E-D6C23DB93553}" type="datetime1">
               <a:rPr lang="ru-RU" noProof="1" smtClean="0"/>
-              <a:t>01.03.2026</a:t>
+              <a:t>03.03.2026</a:t>
             </a:fld>
             <a:endParaRPr lang="ru-RU" noProof="1"/>
           </a:p>
@@ -8639,6 +8639,13 @@
           </p:nvPr>
         </p:nvSpPr>
         <p:spPr/>
+        <p:txBody>
+          <a:bodyPr/>
+          <a:lstStyle/>
+          <a:p>
+            <a:endParaRPr lang="ru-RU"/>
+          </a:p>
+        </p:txBody>
       </p:sp>
       <p:sp>
         <p:nvSpPr>
@@ -8725,6 +8732,13 @@
           </p:nvPr>
         </p:nvSpPr>
         <p:spPr/>
+        <p:txBody>
+          <a:bodyPr/>
+          <a:lstStyle/>
+          <a:p>
+            <a:endParaRPr lang="ru-RU"/>
+          </a:p>
+        </p:txBody>
       </p:sp>
       <p:sp>
         <p:nvSpPr>
@@ -8837,6 +8851,13 @@
             <a:schemeClr val="lt1"/>
           </a:fontRef>
         </p:style>
+        <p:txBody>
+          <a:bodyPr/>
+          <a:lstStyle/>
+          <a:p>
+            <a:endParaRPr lang="ru-RU"/>
+          </a:p>
+        </p:txBody>
       </p:sp>
       <p:sp>
         <p:nvSpPr>
@@ -8877,6 +8898,13 @@
             <a:schemeClr val="lt1"/>
           </a:fontRef>
         </p:style>
+        <p:txBody>
+          <a:bodyPr/>
+          <a:lstStyle/>
+          <a:p>
+            <a:endParaRPr lang="ru-RU"/>
+          </a:p>
+        </p:txBody>
       </p:sp>
       <p:sp>
         <p:nvSpPr>
@@ -9008,7 +9036,7 @@
             <a:pPr rtl="0"/>
             <a:fld id="{779B869A-7DF7-4AFC-A083-05894D93ACA2}" type="datetime1">
               <a:rPr lang="ru-RU" noProof="1" smtClean="0"/>
-              <a:t>01.03.2026</a:t>
+              <a:t>03.03.2026</a:t>
             </a:fld>
             <a:endParaRPr lang="ru-RU" noProof="1"/>
           </a:p>
@@ -9176,7 +9204,7 @@
             <a:pPr rtl="0"/>
             <a:fld id="{CD4789FC-84AC-4768-84E4-BD43459B36C5}" type="datetime1">
               <a:rPr lang="ru-RU" noProof="1" smtClean="0"/>
-              <a:t>01.03.2026</a:t>
+              <a:t>03.03.2026</a:t>
             </a:fld>
             <a:endParaRPr lang="ru-RU" noProof="1"/>
           </a:p>
@@ -9354,7 +9382,7 @@
             <a:pPr rtl="0"/>
             <a:fld id="{BBE00FC1-CF7B-4659-9A4B-7F12C0281335}" type="datetime1">
               <a:rPr lang="ru-RU" noProof="1" smtClean="0"/>
-              <a:t>01.03.2026</a:t>
+              <a:t>03.03.2026</a:t>
             </a:fld>
             <a:endParaRPr lang="ru-RU" noProof="1"/>
           </a:p>
@@ -9522,7 +9550,7 @@
             <a:pPr rtl="0"/>
             <a:fld id="{1C23351C-68D9-42D5-9EC3-F1B8AA605711}" type="datetime1">
               <a:rPr lang="ru-RU" noProof="1" smtClean="0"/>
-              <a:t>01.03.2026</a:t>
+              <a:t>03.03.2026</a:t>
             </a:fld>
             <a:endParaRPr lang="ru-RU" noProof="1"/>
           </a:p>
@@ -9779,7 +9807,7 @@
             <a:pPr rtl="0"/>
             <a:fld id="{CF30139D-AB25-4299-BB33-F53BF6513706}" type="datetime1">
               <a:rPr lang="ru-RU" noProof="1" smtClean="0"/>
-              <a:t>01.03.2026</a:t>
+              <a:t>03.03.2026</a:t>
             </a:fld>
             <a:endParaRPr lang="ru-RU" noProof="1"/>
           </a:p>
@@ -10064,7 +10092,7 @@
             <a:pPr rtl="0"/>
             <a:fld id="{CFC344B3-D503-4D44-B02D-209738ECE0BB}" type="datetime1">
               <a:rPr lang="ru-RU" noProof="1" smtClean="0"/>
-              <a:t>01.03.2026</a:t>
+              <a:t>03.03.2026</a:t>
             </a:fld>
             <a:endParaRPr lang="ru-RU" noProof="1"/>
           </a:p>
@@ -10503,7 +10531,7 @@
             <a:pPr rtl="0"/>
             <a:fld id="{085DA753-2F52-4199-8B70-6811C82AEE0F}" type="datetime1">
               <a:rPr lang="ru-RU" noProof="1" smtClean="0"/>
-              <a:t>01.03.2026</a:t>
+              <a:t>03.03.2026</a:t>
             </a:fld>
             <a:endParaRPr lang="ru-RU" noProof="1"/>
           </a:p>
@@ -10620,7 +10648,7 @@
             <a:pPr rtl="0"/>
             <a:fld id="{30D9CDEF-9B32-433C-B01A-D5B73FC8BB29}" type="datetime1">
               <a:rPr lang="ru-RU" noProof="1" smtClean="0"/>
-              <a:t>01.03.2026</a:t>
+              <a:t>03.03.2026</a:t>
             </a:fld>
             <a:endParaRPr lang="ru-RU" noProof="1"/>
           </a:p>
@@ -10714,7 +10742,7 @@
             <a:pPr rtl="0"/>
             <a:fld id="{8DC1667C-2573-4637-AB7E-C51A89CA1003}" type="datetime1">
               <a:rPr lang="ru-RU" noProof="1" smtClean="0"/>
-              <a:t>01.03.2026</a:t>
+              <a:t>03.03.2026</a:t>
             </a:fld>
             <a:endParaRPr lang="ru-RU" noProof="1"/>
           </a:p>
@@ -11000,7 +11028,7 @@
             <a:pPr rtl="0"/>
             <a:fld id="{28FB90F9-28BD-4A39-8DC4-C668CC79E405}" type="datetime1">
               <a:rPr lang="ru-RU" noProof="1" smtClean="0"/>
-              <a:t>01.03.2026</a:t>
+              <a:t>03.03.2026</a:t>
             </a:fld>
             <a:endParaRPr lang="ru-RU" noProof="1"/>
           </a:p>
@@ -11272,7 +11300,7 @@
             <a:pPr rtl="0"/>
             <a:fld id="{05B6BC9F-46C3-4D61-A6C1-65980DF182CD}" type="datetime1">
               <a:rPr lang="ru-RU" noProof="1" smtClean="0"/>
-              <a:t>01.03.2026</a:t>
+              <a:t>03.03.2026</a:t>
             </a:fld>
             <a:endParaRPr lang="ru-RU" noProof="1"/>
           </a:p>
@@ -11395,6 +11423,13 @@
             <a:schemeClr val="lt1"/>
           </a:fontRef>
         </p:style>
+        <p:txBody>
+          <a:bodyPr/>
+          <a:lstStyle/>
+          <a:p>
+            <a:endParaRPr lang="ru-RU"/>
+          </a:p>
+        </p:txBody>
       </p:sp>
       <p:sp>
         <p:nvSpPr>
@@ -11468,6 +11503,13 @@
             <a:schemeClr val="lt1"/>
           </a:fontRef>
         </p:style>
+        <p:txBody>
+          <a:bodyPr/>
+          <a:lstStyle/>
+          <a:p>
+            <a:endParaRPr lang="ru-RU"/>
+          </a:p>
+        </p:txBody>
       </p:sp>
       <p:sp>
         <p:nvSpPr>
@@ -11567,7 +11609,7 @@
             <a:pPr rtl="0"/>
             <a:fld id="{73E829C1-6644-43E0-BEFE-9CBC3591CACE}" type="datetime1">
               <a:rPr lang="ru-RU" noProof="1" smtClean="0"/>
-              <a:t>01.03.2026</a:t>
+              <a:t>03.03.2026</a:t>
             </a:fld>
             <a:endParaRPr lang="ru-RU" noProof="1"/>
           </a:p>
@@ -12208,6 +12250,13 @@
             <a:schemeClr val="lt1"/>
           </a:fontRef>
         </p:style>
+        <p:txBody>
+          <a:bodyPr/>
+          <a:lstStyle/>
+          <a:p>
+            <a:endParaRPr lang="ru-RU"/>
+          </a:p>
+        </p:txBody>
       </p:sp>
       <p:sp>
         <p:nvSpPr>
@@ -12340,6 +12389,13 @@
             <a:schemeClr val="lt1"/>
           </a:fontRef>
         </p:style>
+        <p:txBody>
+          <a:bodyPr/>
+          <a:lstStyle/>
+          <a:p>
+            <a:endParaRPr lang="ru-RU"/>
+          </a:p>
+        </p:txBody>
       </p:sp>
       <p:sp>
         <p:nvSpPr>
@@ -12479,6 +12535,57 @@
           </a:extLst>
         </p:spPr>
       </p:pic>
+      <p:sp>
+        <p:nvSpPr>
+          <p:cNvPr id="7" name="TextBox 6">
+            <a:extLst>
+              <a:ext uri="{FF2B5EF4-FFF2-40B4-BE49-F238E27FC236}">
+                <a16:creationId xmlns:a16="http://schemas.microsoft.com/office/drawing/2014/main" id="{FB17CD86-B525-0D41-B24C-C9B642D309FB}"/>
+              </a:ext>
+            </a:extLst>
+          </p:cNvPr>
+          <p:cNvSpPr txBox="1"/>
+          <p:nvPr/>
+        </p:nvSpPr>
+        <p:spPr>
+          <a:xfrm>
+            <a:off x="7063136" y="4369046"/>
+            <a:ext cx="3910686" cy="646331"/>
+          </a:xfrm>
+          <a:prstGeom prst="rect">
+            <a:avLst/>
+          </a:prstGeom>
+          <a:noFill/>
+        </p:spPr>
+        <p:txBody>
+          <a:bodyPr wrap="none" rtlCol="0">
+            <a:spAutoFit/>
+          </a:bodyPr>
+          <a:lstStyle/>
+          <a:p>
+            <a:pPr algn="ctr"/>
+            <a:r>
+              <a:rPr lang="en-US" dirty="0"/>
+              <a:t>Deep Learning (семестр 2, </a:t>
+            </a:r>
+            <a:r>
+              <a:rPr lang="en-US" dirty="0" err="1"/>
+              <a:t>осень</a:t>
+            </a:r>
+            <a:r>
+              <a:rPr lang="en-US" dirty="0"/>
+              <a:t> 2025)</a:t>
+            </a:r>
+            <a:br>
+              <a:rPr lang="ru-RU" dirty="0"/>
+            </a:br>
+            <a:r>
+              <a:rPr lang="en-US" dirty="0"/>
+              <a:t>NLP</a:t>
+            </a:r>
+          </a:p>
+        </p:txBody>
+      </p:sp>
     </p:spTree>
     <p:extLst>
       <p:ext uri="{BB962C8B-B14F-4D97-AF65-F5344CB8AC3E}">
@@ -12895,6 +13002,13 @@
           </a:effectRef>
           <a:fontRef idx="minor"/>
         </p:style>
+        <p:txBody>
+          <a:bodyPr/>
+          <a:lstStyle/>
+          <a:p>
+            <a:endParaRPr lang="ru-RU"/>
+          </a:p>
+        </p:txBody>
       </p:sp>
       <p:sp>
         <p:nvSpPr>
@@ -12960,6 +13074,13 @@
             </a:schemeClr>
           </a:fontRef>
         </p:style>
+        <p:txBody>
+          <a:bodyPr/>
+          <a:lstStyle/>
+          <a:p>
+            <a:endParaRPr lang="ru-RU"/>
+          </a:p>
+        </p:txBody>
       </p:sp>
     </p:spTree>
     <p:extLst>
@@ -13083,6 +13204,13 @@
           </a:effectRef>
           <a:fontRef idx="minor"/>
         </p:style>
+        <p:txBody>
+          <a:bodyPr/>
+          <a:lstStyle/>
+          <a:p>
+            <a:endParaRPr lang="ru-RU"/>
+          </a:p>
+        </p:txBody>
       </p:sp>
       <p:sp>
         <p:nvSpPr>
@@ -13148,6 +13276,13 @@
             </a:schemeClr>
           </a:fontRef>
         </p:style>
+        <p:txBody>
+          <a:bodyPr/>
+          <a:lstStyle/>
+          <a:p>
+            <a:endParaRPr lang="ru-RU"/>
+          </a:p>
+        </p:txBody>
       </p:sp>
       <p:sp>
         <p:nvSpPr>
@@ -13353,6 +13488,13 @@
           </a:effectRef>
           <a:fontRef idx="minor"/>
         </p:style>
+        <p:txBody>
+          <a:bodyPr/>
+          <a:lstStyle/>
+          <a:p>
+            <a:endParaRPr lang="ru-RU"/>
+          </a:p>
+        </p:txBody>
       </p:sp>
       <p:sp>
         <p:nvSpPr>
@@ -13418,6 +13560,13 @@
             </a:schemeClr>
           </a:fontRef>
         </p:style>
+        <p:txBody>
+          <a:bodyPr/>
+          <a:lstStyle/>
+          <a:p>
+            <a:endParaRPr lang="ru-RU"/>
+          </a:p>
+        </p:txBody>
       </p:sp>
     </p:spTree>
     <p:extLst>
@@ -13656,6 +13805,13 @@
           </a:effectRef>
           <a:fontRef idx="minor"/>
         </p:style>
+        <p:txBody>
+          <a:bodyPr/>
+          <a:lstStyle/>
+          <a:p>
+            <a:endParaRPr lang="ru-RU"/>
+          </a:p>
+        </p:txBody>
       </p:sp>
       <p:sp>
         <p:nvSpPr>
@@ -13721,6 +13877,13 @@
             </a:schemeClr>
           </a:fontRef>
         </p:style>
+        <p:txBody>
+          <a:bodyPr/>
+          <a:lstStyle/>
+          <a:p>
+            <a:endParaRPr lang="ru-RU"/>
+          </a:p>
+        </p:txBody>
       </p:sp>
     </p:spTree>
     <p:extLst>
@@ -13951,6 +14114,13 @@
           </a:effectRef>
           <a:fontRef idx="minor"/>
         </p:style>
+        <p:txBody>
+          <a:bodyPr/>
+          <a:lstStyle/>
+          <a:p>
+            <a:endParaRPr lang="ru-RU"/>
+          </a:p>
+        </p:txBody>
       </p:sp>
       <p:sp>
         <p:nvSpPr>
@@ -14016,6 +14186,13 @@
             </a:schemeClr>
           </a:fontRef>
         </p:style>
+        <p:txBody>
+          <a:bodyPr/>
+          <a:lstStyle/>
+          <a:p>
+            <a:endParaRPr lang="ru-RU"/>
+          </a:p>
+        </p:txBody>
       </p:sp>
     </p:spTree>
     <p:extLst>
@@ -14827,6 +15004,13 @@
           </a:effectRef>
           <a:fontRef idx="minor"/>
         </p:style>
+        <p:txBody>
+          <a:bodyPr/>
+          <a:lstStyle/>
+          <a:p>
+            <a:endParaRPr lang="ru-RU"/>
+          </a:p>
+        </p:txBody>
       </p:sp>
       <p:sp>
         <p:nvSpPr>
@@ -14889,6 +15073,13 @@
             </a:schemeClr>
           </a:fontRef>
         </p:style>
+        <p:txBody>
+          <a:bodyPr/>
+          <a:lstStyle/>
+          <a:p>
+            <a:endParaRPr lang="ru-RU"/>
+          </a:p>
+        </p:txBody>
       </p:sp>
       <p:pic>
         <p:nvPicPr>
@@ -15136,6 +15327,13 @@
           </a:effectRef>
           <a:fontRef idx="minor"/>
         </p:style>
+        <p:txBody>
+          <a:bodyPr/>
+          <a:lstStyle/>
+          <a:p>
+            <a:endParaRPr lang="ru-RU"/>
+          </a:p>
+        </p:txBody>
       </p:sp>
       <p:sp>
         <p:nvSpPr>
@@ -15198,6 +15396,13 @@
             </a:schemeClr>
           </a:fontRef>
         </p:style>
+        <p:txBody>
+          <a:bodyPr/>
+          <a:lstStyle/>
+          <a:p>
+            <a:endParaRPr lang="ru-RU"/>
+          </a:p>
+        </p:txBody>
       </p:sp>
       <p:pic>
         <p:nvPicPr>
@@ -15435,6 +15640,13 @@
           </a:effectRef>
           <a:fontRef idx="minor"/>
         </p:style>
+        <p:txBody>
+          <a:bodyPr/>
+          <a:lstStyle/>
+          <a:p>
+            <a:endParaRPr lang="ru-RU"/>
+          </a:p>
+        </p:txBody>
       </p:sp>
       <p:sp>
         <p:nvSpPr>
@@ -15500,6 +15712,13 @@
             </a:schemeClr>
           </a:fontRef>
         </p:style>
+        <p:txBody>
+          <a:bodyPr/>
+          <a:lstStyle/>
+          <a:p>
+            <a:endParaRPr lang="ru-RU"/>
+          </a:p>
+        </p:txBody>
       </p:sp>
     </p:spTree>
     <p:extLst>
@@ -15734,6 +15953,13 @@
           </a:effectRef>
           <a:fontRef idx="minor"/>
         </p:style>
+        <p:txBody>
+          <a:bodyPr/>
+          <a:lstStyle/>
+          <a:p>
+            <a:endParaRPr lang="ru-RU"/>
+          </a:p>
+        </p:txBody>
       </p:sp>
       <p:sp>
         <p:nvSpPr>
@@ -15796,6 +16022,13 @@
             </a:schemeClr>
           </a:fontRef>
         </p:style>
+        <p:txBody>
+          <a:bodyPr/>
+          <a:lstStyle/>
+          <a:p>
+            <a:endParaRPr lang="ru-RU"/>
+          </a:p>
+        </p:txBody>
       </p:sp>
     </p:spTree>
     <p:extLst>
@@ -15919,6 +16152,13 @@
           </a:effectRef>
           <a:fontRef idx="minor"/>
         </p:style>
+        <p:txBody>
+          <a:bodyPr/>
+          <a:lstStyle/>
+          <a:p>
+            <a:endParaRPr lang="ru-RU"/>
+          </a:p>
+        </p:txBody>
       </p:sp>
       <p:sp>
         <p:nvSpPr>
@@ -15981,6 +16221,13 @@
             </a:schemeClr>
           </a:fontRef>
         </p:style>
+        <p:txBody>
+          <a:bodyPr/>
+          <a:lstStyle/>
+          <a:p>
+            <a:endParaRPr lang="ru-RU"/>
+          </a:p>
+        </p:txBody>
       </p:sp>
       <p:sp>
         <p:nvSpPr>
@@ -16275,6 +16522,13 @@
           </a:effectRef>
           <a:fontRef idx="minor"/>
         </p:style>
+        <p:txBody>
+          <a:bodyPr/>
+          <a:lstStyle/>
+          <a:p>
+            <a:endParaRPr lang="ru-RU"/>
+          </a:p>
+        </p:txBody>
       </p:sp>
       <p:sp>
         <p:nvSpPr>
@@ -16340,6 +16594,13 @@
             </a:schemeClr>
           </a:fontRef>
         </p:style>
+        <p:txBody>
+          <a:bodyPr/>
+          <a:lstStyle/>
+          <a:p>
+            <a:endParaRPr lang="ru-RU"/>
+          </a:p>
+        </p:txBody>
       </p:sp>
     </p:spTree>
     <p:extLst>
@@ -16462,6 +16723,13 @@
           </a:effectRef>
           <a:fontRef idx="minor"/>
         </p:style>
+        <p:txBody>
+          <a:bodyPr/>
+          <a:lstStyle/>
+          <a:p>
+            <a:endParaRPr lang="ru-RU"/>
+          </a:p>
+        </p:txBody>
       </p:sp>
       <p:sp>
         <p:nvSpPr>
@@ -16524,6 +16792,13 @@
             </a:schemeClr>
           </a:fontRef>
         </p:style>
+        <p:txBody>
+          <a:bodyPr/>
+          <a:lstStyle/>
+          <a:p>
+            <a:endParaRPr lang="ru-RU"/>
+          </a:p>
+        </p:txBody>
       </p:sp>
       <p:pic>
         <p:nvPicPr>
@@ -17398,6 +17673,23 @@
 </file>
 
 <file path=customXml/item1.xml><?xml version="1.0" encoding="utf-8"?>
+<p:properties xmlns:p="http://schemas.microsoft.com/office/2006/metadata/properties" xmlns:xsi="http://www.w3.org/2001/XMLSchema-instance" xmlns:pc="http://schemas.microsoft.com/office/infopath/2007/PartnerControls">
+  <documentManagement>
+    <MediaServiceKeyPoints xmlns="71af3243-3dd4-4a8d-8c0d-dd76da1f02a5" xsi:nil="true"/>
+  </documentManagement>
+</p:properties>
+</file>
+
+<file path=customXml/item2.xml><?xml version="1.0" encoding="utf-8"?>
+<?mso-contentType ?>
+<FormTemplates xmlns="http://schemas.microsoft.com/sharepoint/v3/contenttype/forms">
+  <Display>DocumentLibraryForm</Display>
+  <Edit>DocumentLibraryForm</Edit>
+  <New>DocumentLibraryForm</New>
+</FormTemplates>
+</file>
+
+<file path=customXml/item3.xml><?xml version="1.0" encoding="utf-8"?>
 <ct:contentTypeSchema xmlns:ct="http://schemas.microsoft.com/office/2006/metadata/contentType" xmlns:ma="http://schemas.microsoft.com/office/2006/metadata/properties/metaAttributes" ct:_="" ma:_="" ma:contentTypeName="Document" ma:contentTypeID="0x01010079F111ED35F8CC479449609E8A0923A6" ma:contentTypeVersion="11" ma:contentTypeDescription="Create a new document." ma:contentTypeScope="" ma:versionID="9677210f24a1be23c92c90fd886aa0aa">
   <xsd:schema xmlns:xsd="http://www.w3.org/2001/XMLSchema" xmlns:xs="http://www.w3.org/2001/XMLSchema" xmlns:p="http://schemas.microsoft.com/office/2006/metadata/properties" xmlns:ns2="71af3243-3dd4-4a8d-8c0d-dd76da1f02a5" xmlns:ns3="16c05727-aa75-4e4a-9b5f-8a80a1165891" targetNamespace="http://schemas.microsoft.com/office/2006/metadata/properties" ma:root="true" ma:fieldsID="60e05723c5c1908df1a1a4ebf11d344e" ns2:_="" ns3:_="">
     <xsd:import namespace="71af3243-3dd4-4a8d-8c0d-dd76da1f02a5"/>
@@ -17608,24 +17900,32 @@
 </ct:contentTypeSchema>
 </file>
 
-<file path=customXml/item2.xml><?xml version="1.0" encoding="utf-8"?>
-<?mso-contentType ?>
-<FormTemplates xmlns="http://schemas.microsoft.com/sharepoint/v3/contenttype/forms">
-  <Display>DocumentLibraryForm</Display>
-  <Edit>DocumentLibraryForm</Edit>
-  <New>DocumentLibraryForm</New>
-</FormTemplates>
+<file path=customXml/itemProps1.xml><?xml version="1.0" encoding="utf-8"?>
+<ds:datastoreItem xmlns:ds="http://schemas.openxmlformats.org/officeDocument/2006/customXml" ds:itemID="{D5A9C098-A058-4A59-AA77-E2402053F600}">
+  <ds:schemaRefs>
+    <ds:schemaRef ds:uri="http://purl.org/dc/terms/"/>
+    <ds:schemaRef ds:uri="http://schemas.openxmlformats.org/package/2006/metadata/core-properties"/>
+    <ds:schemaRef ds:uri="16c05727-aa75-4e4a-9b5f-8a80a1165891"/>
+    <ds:schemaRef ds:uri="http://purl.org/dc/dcmitype/"/>
+    <ds:schemaRef ds:uri="http://schemas.microsoft.com/office/2006/documentManagement/types"/>
+    <ds:schemaRef ds:uri="http://purl.org/dc/elements/1.1/"/>
+    <ds:schemaRef ds:uri="http://schemas.microsoft.com/office/2006/metadata/properties"/>
+    <ds:schemaRef ds:uri="http://schemas.microsoft.com/office/infopath/2007/PartnerControls"/>
+    <ds:schemaRef ds:uri="71af3243-3dd4-4a8d-8c0d-dd76da1f02a5"/>
+    <ds:schemaRef ds:uri="http://www.w3.org/XML/1998/namespace"/>
+  </ds:schemaRefs>
+</ds:datastoreItem>
 </file>
 
-<file path=customXml/item3.xml><?xml version="1.0" encoding="utf-8"?>
-<p:properties xmlns:p="http://schemas.microsoft.com/office/2006/metadata/properties" xmlns:xsi="http://www.w3.org/2001/XMLSchema-instance" xmlns:pc="http://schemas.microsoft.com/office/infopath/2007/PartnerControls">
-  <documentManagement>
-    <MediaServiceKeyPoints xmlns="71af3243-3dd4-4a8d-8c0d-dd76da1f02a5" xsi:nil="true"/>
-  </documentManagement>
-</p:properties>
+<file path=customXml/itemProps2.xml><?xml version="1.0" encoding="utf-8"?>
+<ds:datastoreItem xmlns:ds="http://schemas.openxmlformats.org/officeDocument/2006/customXml" ds:itemID="{8CEA0254-3646-4633-AE89-92733C2D6975}">
+  <ds:schemaRefs>
+    <ds:schemaRef ds:uri="http://schemas.microsoft.com/sharepoint/v3/contenttype/forms"/>
+  </ds:schemaRefs>
+</ds:datastoreItem>
 </file>
 
-<file path=customXml/itemProps1.xml><?xml version="1.0" encoding="utf-8"?>
+<file path=customXml/itemProps3.xml><?xml version="1.0" encoding="utf-8"?>
 <ds:datastoreItem xmlns:ds="http://schemas.openxmlformats.org/officeDocument/2006/customXml" ds:itemID="{0BD8AF61-0EFE-4B67-AC63-165AA360F942}">
   <ds:schemaRefs>
     <ds:schemaRef ds:uri="http://schemas.microsoft.com/office/2006/metadata/contentType"/>
@@ -17642,22 +17942,4 @@
     <ds:schemaRef ds:uri="http://schemas.microsoft.com/internal/obd"/>
   </ds:schemaRefs>
 </ds:datastoreItem>
-</file>
-
-<file path=customXml/itemProps2.xml><?xml version="1.0" encoding="utf-8"?>
-<ds:datastoreItem xmlns:ds="http://schemas.openxmlformats.org/officeDocument/2006/customXml" ds:itemID="{8CEA0254-3646-4633-AE89-92733C2D6975}">
-  <ds:schemaRefs>
-    <ds:schemaRef ds:uri="http://schemas.microsoft.com/sharepoint/v3/contenttype/forms"/>
-  </ds:schemaRefs>
-</ds:datastoreItem>
-</file>
-
-<file path=customXml/itemProps3.xml><?xml version="1.0" encoding="utf-8"?>
-<ds:datastoreItem xmlns:ds="http://schemas.openxmlformats.org/officeDocument/2006/customXml" ds:itemID="{D5A9C098-A058-4A59-AA77-E2402053F600}">
-  <ds:schemaRefs>
-    <ds:schemaRef ds:uri="http://schemas.microsoft.com/office/2006/metadata/properties"/>
-    <ds:schemaRef ds:uri="http://schemas.microsoft.com/office/infopath/2007/PartnerControls"/>
-    <ds:schemaRef ds:uri="71af3243-3dd4-4a8d-8c0d-dd76da1f02a5"/>
-  </ds:schemaRefs>
-</ds:datastoreItem>
 </file>